--- a/Lecture slides/AMOS B05 - Agile Programming.pptx
+++ b/Lecture slides/AMOS B05 - Agile Programming.pptx
@@ -13750,7 +13750,7 @@
             <a:tbl>
               <a:tblPr>
                 <a:noFill/>
-                <a:tableStyleId>{0C38976B-422C-4C88-8A64-38ABB796B265}</a:tableStyleId>
+                <a:tableStyleId>{64A23E28-3ACD-4295-A373-06A251A66DE4}</a:tableStyleId>
               </a:tblPr>
               <a:tblGrid>
                 <a:gridCol w="2865125"/>
@@ -16922,7 +16922,7 @@
             <a:tbl>
               <a:tblPr>
                 <a:noFill/>
-                <a:tableStyleId>{0C38976B-422C-4C88-8A64-38ABB796B265}</a:tableStyleId>
+                <a:tableStyleId>{64A23E28-3ACD-4295-A373-06A251A66DE4}</a:tableStyleId>
               </a:tblPr>
               <a:tblGrid>
                 <a:gridCol w="2865125"/>
@@ -26441,9 +26441,9 @@
 </file>
 
 <file path=ppt/theme/theme1.xml><?xml version="1.0" encoding="utf-8"?>
-<a:theme xmlns:a="http://schemas.openxmlformats.org/drawingml/2006/main" xmlns:r="http://schemas.openxmlformats.org/officeDocument/2006/relationships">
+<a:theme xmlns:a="http://schemas.openxmlformats.org/drawingml/2006/main" xmlns:r="http://schemas.openxmlformats.org/officeDocument/2006/relationships" name="AMOS Slides Template">
   <a:themeElements>
-    <a:clrScheme name="Default">
+    <a:clrScheme name="Simple Light">
       <a:dk1>
         <a:srgbClr val="000000"/>
       </a:dk1>
@@ -26451,34 +26451,34 @@
         <a:srgbClr val="FFFFFF"/>
       </a:lt1>
       <a:dk2>
-        <a:srgbClr val="158158"/>
+        <a:srgbClr val="404040"/>
       </a:dk2>
       <a:lt2>
-        <a:srgbClr val="F3F3F3"/>
+        <a:srgbClr val="808080"/>
       </a:lt2>
       <a:accent1>
-        <a:srgbClr val="058DC7"/>
+        <a:srgbClr val="D0D0D0"/>
       </a:accent1>
       <a:accent2>
-        <a:srgbClr val="50B432"/>
+        <a:srgbClr val="4169E1"/>
       </a:accent2>
       <a:accent3>
-        <a:srgbClr val="ED561B"/>
+        <a:srgbClr val="4CAF50"/>
       </a:accent3>
       <a:accent4>
-        <a:srgbClr val="EDEF00"/>
+        <a:srgbClr val="FEB612"/>
       </a:accent4>
       <a:accent5>
-        <a:srgbClr val="24CBE5"/>
+        <a:srgbClr val="F36838"/>
       </a:accent5>
       <a:accent6>
-        <a:srgbClr val="64E572"/>
+        <a:srgbClr val="8E44AD"/>
       </a:accent6>
       <a:hlink>
-        <a:srgbClr val="2200CC"/>
+        <a:srgbClr val="1E90FF"/>
       </a:hlink>
       <a:folHlink>
-        <a:srgbClr val="551A8B"/>
+        <a:srgbClr val="0097A7"/>
       </a:folHlink>
     </a:clrScheme>
     <a:fontScheme name="Office">
@@ -26999,9 +26999,9 @@
 </file>
 
 <file path=ppt/theme/theme3.xml><?xml version="1.0" encoding="utf-8"?>
-<a:theme xmlns:a="http://schemas.openxmlformats.org/drawingml/2006/main" xmlns:r="http://schemas.openxmlformats.org/officeDocument/2006/relationships" name="AMOS Slides Template">
+<a:theme xmlns:a="http://schemas.openxmlformats.org/drawingml/2006/main" xmlns:r="http://schemas.openxmlformats.org/officeDocument/2006/relationships">
   <a:themeElements>
-    <a:clrScheme name="Simple Light">
+    <a:clrScheme name="Default">
       <a:dk1>
         <a:srgbClr val="000000"/>
       </a:dk1>
@@ -27009,34 +27009,34 @@
         <a:srgbClr val="FFFFFF"/>
       </a:lt1>
       <a:dk2>
-        <a:srgbClr val="404040"/>
+        <a:srgbClr val="158158"/>
       </a:dk2>
       <a:lt2>
-        <a:srgbClr val="808080"/>
+        <a:srgbClr val="F3F3F3"/>
       </a:lt2>
       <a:accent1>
-        <a:srgbClr val="D0D0D0"/>
+        <a:srgbClr val="058DC7"/>
       </a:accent1>
       <a:accent2>
-        <a:srgbClr val="4169E1"/>
+        <a:srgbClr val="50B432"/>
       </a:accent2>
       <a:accent3>
-        <a:srgbClr val="4CAF50"/>
+        <a:srgbClr val="ED561B"/>
       </a:accent3>
       <a:accent4>
-        <a:srgbClr val="FEB612"/>
+        <a:srgbClr val="EDEF00"/>
       </a:accent4>
       <a:accent5>
-        <a:srgbClr val="F36838"/>
+        <a:srgbClr val="24CBE5"/>
       </a:accent5>
       <a:accent6>
-        <a:srgbClr val="8E44AD"/>
+        <a:srgbClr val="64E572"/>
       </a:accent6>
       <a:hlink>
-        <a:srgbClr val="1E90FF"/>
+        <a:srgbClr val="2200CC"/>
       </a:hlink>
       <a:folHlink>
-        <a:srgbClr val="0097A7"/>
+        <a:srgbClr val="551A8B"/>
       </a:folHlink>
     </a:clrScheme>
     <a:fontScheme name="Office">
